--- a/output/UTS_BDASC_Francisco_Correia_Soares.pptx
+++ b/output/UTS_BDASC_Francisco_Correia_Soares.pptx
@@ -23010,7 +23010,7 @@
                 <a:ea typeface="Calibri" pitchFamily="34" charset="-122"/>
                 <a:cs typeface="Calibri" pitchFamily="34" charset="-120"/>
               </a:rPr>
-              <a:t>Menjawab: kapan, produk apa, dan kategori apa yang paling menghasilkan. Isinya grafik garis revenue per bulan, bar chart per produk, dan donut per kategori. Slicer Year dan Region menyaring seluruh visual.</a:t>
+              <a:t>Menjawab: kapan, produk apa, dan kategori apa yang paling menghasilkan. Isinya grafik garis revenue per bulan, bar chart per produk, dan donut per kategori. Klik pada grafik menyaring visual lainnya (cross-filtering).</a:t>
             </a:r>
             <a:endParaRPr lang="en-US" sz="1500" dirty="0"/>
           </a:p>
@@ -23883,7 +23883,7 @@
                 <a:ea typeface="Calibri" pitchFamily="34" charset="-122"/>
                 <a:cs typeface="Calibri" pitchFamily="34" charset="-120"/>
               </a:rPr>
-              <a:t>Grafik garis Total Revenue by Month: puncak Juli, dasar November.</a:t>
+              <a:t>Grafik garis Total Revenue by Month (hanya tahun 2024): puncak Juli, dasar November.</a:t>
             </a:r>
             <a:endParaRPr lang="en-US" sz="1300" dirty="0"/>
           </a:p>
@@ -23946,7 +23946,7 @@
                 <a:ea typeface="Calibri" pitchFamily="34" charset="-122"/>
                 <a:cs typeface="Calibri" pitchFamily="34" charset="-120"/>
               </a:rPr>
-              <a:t>Slicer Year dan Region menyaring semua visual.</a:t>
+              <a:t>Halaman ini tidak memakai slicer; interaktivitas lewat klik pada grafik.</a:t>
             </a:r>
             <a:endParaRPr lang="en-US" sz="1300" dirty="0"/>
           </a:p>
@@ -23967,7 +23967,7 @@
                 <a:ea typeface="Calibri" pitchFamily="34" charset="-122"/>
                 <a:cs typeface="Calibri" pitchFamily="34" charset="-120"/>
               </a:rPr>
-              <a:t>Klik satu titik atau batang untuk menyaring visual lain (cross-filtering).</a:t>
+              <a:t>Klik satu titik, batang, atau irisan untuk menyaring visual lain (cross-filtering).</a:t>
             </a:r>
             <a:endParaRPr lang="en-US" sz="1300" dirty="0"/>
           </a:p>

--- a/output/UTS_BDASC_Francisco_Correia_Soares.pptx
+++ b/output/UTS_BDASC_Francisco_Correia_Soares.pptx
@@ -4506,7 +4506,7 @@
           <a:p>
             <a:r>
               <a:rPr lang="en-US" dirty="0"/>
-              <a:t>Dataset terdiri dari 3 tabel dan 15 kolom. Karena CustomerID, ProductID, dan Price muncul di dua tabel, variabel unik berjumlah 12. Ada 1.000 transaksi pada periode 30 Desember 2023 sampai 28 Desember 2024.</a:t>
+              <a:t>Dataset terdiri dari 3 tabel dan 15 kolom. Karena CustomerID, ProductID, dan Price muncul di dua tabel, variabel unik berjumlah 12. Ada 1.000 transaksi pada periode 30 Desember 2023 sampai 28 Desember 2024. Pelanggan: 200 terdaftar, 199 bertransaksi, 1 belum (C0180).</a:t>
             </a:r>
             <a:endParaRPr lang="en-US" dirty="0"/>
           </a:p>
@@ -33478,18 +33478,19 @@
             <a:tbl>
               <a:tblPr/>
               <a:tblGrid>
-                <a:gridCol w="1828800"/>
-                <a:gridCol w="1554480"/>
-                <a:gridCol w="1554480"/>
-                <a:gridCol w="6126480"/>
+                <a:gridCol w="1463040"/>
+                <a:gridCol w="1097280"/>
+                <a:gridCol w="1188720"/>
+                <a:gridCol w="3657600"/>
+                <a:gridCol w="3657600"/>
               </a:tblGrid>
-              <a:tr h="502920">
+              <a:tr h="566928">
                 <a:tc>
                   <a:txBody>
                     <a:bodyPr/>
                     <a:lstStyle/>
                     <a:p>
-                      <a:pPr indent="0" marL="0">
+                      <a:pPr algn="l" indent="0" marL="0">
                         <a:buNone/>
                       </a:pPr>
                       <a:r>
@@ -33557,7 +33558,7 @@
                     <a:bodyPr/>
                     <a:lstStyle/>
                     <a:p>
-                      <a:pPr indent="0" marL="0">
+                      <a:pPr algn="l" indent="0" marL="0">
                         <a:buNone/>
                       </a:pPr>
                       <a:r>
@@ -33625,7 +33626,7 @@
                     <a:bodyPr/>
                     <a:lstStyle/>
                     <a:p>
-                      <a:pPr indent="0" marL="0">
+                      <a:pPr algn="l" indent="0" marL="0">
                         <a:buNone/>
                       </a:pPr>
                       <a:r>
@@ -33693,7 +33694,7 @@
                     <a:bodyPr/>
                     <a:lstStyle/>
                     <a:p>
-                      <a:pPr indent="0" marL="0">
+                      <a:pPr algn="l" indent="0" marL="0">
                         <a:buNone/>
                       </a:pPr>
                       <a:r>
@@ -33756,18 +33757,86 @@
                     </a:solidFill>
                   </a:tcPr>
                 </a:tc>
-              </a:tr>
-              <a:tr h="502920">
                 <a:tc>
                   <a:txBody>
                     <a:bodyPr/>
                     <a:lstStyle/>
                     <a:p>
-                      <a:pPr indent="0" marL="0">
+                      <a:pPr algn="l" indent="0" marL="0">
                         <a:buNone/>
                       </a:pPr>
                       <a:r>
-                        <a:rPr lang="en-US" sz="1300" dirty="0">
+                        <a:rPr lang="en-US" sz="1300" b="1" dirty="0">
+                          <a:solidFill>
+                            <a:srgbClr val="FFFFFF"/>
+                          </a:solidFill>
+                          <a:latin typeface="Calibri" pitchFamily="34" charset="0"/>
+                          <a:ea typeface="Calibri" pitchFamily="34" charset="-122"/>
+                          <a:cs typeface="Calibri" pitchFamily="34" charset="-120"/>
+                        </a:rPr>
+                        <a:t>Keterangan</a:t>
+                      </a:r>
+                      <a:endParaRPr lang="en-US" sz="1300" dirty="0">
+                        <a:latin typeface="Calibri" charset="0"/>
+                        <a:ea typeface="Calibri" charset="0"/>
+                        <a:cs typeface="Calibri" charset="0"/>
+                      </a:endParaRPr>
+                    </a:p>
+                  </a:txBody>
+                  <a:tcPr marL="91440" marR="91440" marT="45720" marB="45720" anchor="ctr">
+                    <a:lnL w="9525" cap="flat" cmpd="sng" algn="ctr">
+                      <a:solidFill>
+                        <a:srgbClr val="D5DDE3"/>
+                      </a:solidFill>
+                      <a:prstDash val="solid"/>
+                      <a:round/>
+                      <a:headEnd type="none" w="med" len="med"/>
+                      <a:tailEnd type="none" w="med" len="med"/>
+                    </a:lnL>
+                    <a:lnR w="9525" cap="flat" cmpd="sng" algn="ctr">
+                      <a:solidFill>
+                        <a:srgbClr val="D5DDE3"/>
+                      </a:solidFill>
+                      <a:prstDash val="solid"/>
+                      <a:round/>
+                      <a:headEnd type="none" w="med" len="med"/>
+                      <a:tailEnd type="none" w="med" len="med"/>
+                    </a:lnR>
+                    <a:lnT w="9525" cap="flat" cmpd="sng" algn="ctr">
+                      <a:solidFill>
+                        <a:srgbClr val="D5DDE3"/>
+                      </a:solidFill>
+                      <a:prstDash val="solid"/>
+                      <a:round/>
+                      <a:headEnd type="none" w="med" len="med"/>
+                      <a:tailEnd type="none" w="med" len="med"/>
+                    </a:lnT>
+                    <a:lnB w="9525" cap="flat" cmpd="sng" algn="ctr">
+                      <a:solidFill>
+                        <a:srgbClr val="D5DDE3"/>
+                      </a:solidFill>
+                      <a:prstDash val="solid"/>
+                      <a:round/>
+                      <a:headEnd type="none" w="med" len="med"/>
+                      <a:tailEnd type="none" w="med" len="med"/>
+                    </a:lnB>
+                    <a:solidFill>
+                      <a:srgbClr val="1B9AAA"/>
+                    </a:solidFill>
+                  </a:tcPr>
+                </a:tc>
+              </a:tr>
+              <a:tr h="566928">
+                <a:tc>
+                  <a:txBody>
+                    <a:bodyPr/>
+                    <a:lstStyle/>
+                    <a:p>
+                      <a:pPr algn="l" indent="0" marL="0">
+                        <a:buNone/>
+                      </a:pPr>
+                      <a:r>
+                        <a:rPr lang="en-US" sz="1300" b="1" dirty="0">
                           <a:solidFill>
                             <a:srgbClr val="1E2A35"/>
                           </a:solidFill>
@@ -33828,7 +33897,7 @@
                     <a:bodyPr/>
                     <a:lstStyle/>
                     <a:p>
-                      <a:pPr indent="0" marL="0">
+                      <a:pPr algn="l" indent="0" marL="0">
                         <a:buNone/>
                       </a:pPr>
                       <a:r>
@@ -33893,7 +33962,7 @@
                     <a:bodyPr/>
                     <a:lstStyle/>
                     <a:p>
-                      <a:pPr indent="0" marL="0">
+                      <a:pPr algn="l" indent="0" marL="0">
                         <a:buNone/>
                       </a:pPr>
                       <a:r>
@@ -33958,7 +34027,7 @@
                     <a:bodyPr/>
                     <a:lstStyle/>
                     <a:p>
-                      <a:pPr indent="0" marL="0">
+                      <a:pPr algn="l" indent="0" marL="0">
                         <a:buNone/>
                       </a:pPr>
                       <a:r>
@@ -34018,18 +34087,83 @@
                     </a:lnB>
                   </a:tcPr>
                 </a:tc>
-              </a:tr>
-              <a:tr h="502920">
                 <a:tc>
                   <a:txBody>
                     <a:bodyPr/>
                     <a:lstStyle/>
                     <a:p>
-                      <a:pPr indent="0" marL="0">
+                      <a:pPr algn="l" indent="0" marL="0">
                         <a:buNone/>
                       </a:pPr>
                       <a:r>
                         <a:rPr lang="en-US" sz="1300" dirty="0">
+                          <a:solidFill>
+                            <a:srgbClr val="1E2A35"/>
+                          </a:solidFill>
+                          <a:latin typeface="Calibri" pitchFamily="34" charset="0"/>
+                          <a:ea typeface="Calibri" pitchFamily="34" charset="-122"/>
+                          <a:cs typeface="Calibri" pitchFamily="34" charset="-120"/>
+                        </a:rPr>
+                        <a:t>Data pelanggan: 200 terdaftar, 199 bertransaksi, 1 belum bertransaksi</a:t>
+                      </a:r>
+                      <a:endParaRPr lang="en-US" sz="1300" dirty="0">
+                        <a:latin typeface="Calibri" charset="0"/>
+                        <a:ea typeface="Calibri" charset="0"/>
+                        <a:cs typeface="Calibri" charset="0"/>
+                      </a:endParaRPr>
+                    </a:p>
+                  </a:txBody>
+                  <a:tcPr marL="91440" marR="91440" marT="45720" marB="45720" anchor="ctr">
+                    <a:lnL w="9525" cap="flat" cmpd="sng" algn="ctr">
+                      <a:solidFill>
+                        <a:srgbClr val="D5DDE3"/>
+                      </a:solidFill>
+                      <a:prstDash val="solid"/>
+                      <a:round/>
+                      <a:headEnd type="none" w="med" len="med"/>
+                      <a:tailEnd type="none" w="med" len="med"/>
+                    </a:lnL>
+                    <a:lnR w="9525" cap="flat" cmpd="sng" algn="ctr">
+                      <a:solidFill>
+                        <a:srgbClr val="D5DDE3"/>
+                      </a:solidFill>
+                      <a:prstDash val="solid"/>
+                      <a:round/>
+                      <a:headEnd type="none" w="med" len="med"/>
+                      <a:tailEnd type="none" w="med" len="med"/>
+                    </a:lnR>
+                    <a:lnT w="9525" cap="flat" cmpd="sng" algn="ctr">
+                      <a:solidFill>
+                        <a:srgbClr val="D5DDE3"/>
+                      </a:solidFill>
+                      <a:prstDash val="solid"/>
+                      <a:round/>
+                      <a:headEnd type="none" w="med" len="med"/>
+                      <a:tailEnd type="none" w="med" len="med"/>
+                    </a:lnT>
+                    <a:lnB w="9525" cap="flat" cmpd="sng" algn="ctr">
+                      <a:solidFill>
+                        <a:srgbClr val="D5DDE3"/>
+                      </a:solidFill>
+                      <a:prstDash val="solid"/>
+                      <a:round/>
+                      <a:headEnd type="none" w="med" len="med"/>
+                      <a:tailEnd type="none" w="med" len="med"/>
+                    </a:lnB>
+                  </a:tcPr>
+                </a:tc>
+              </a:tr>
+              <a:tr h="566928">
+                <a:tc>
+                  <a:txBody>
+                    <a:bodyPr/>
+                    <a:lstStyle/>
+                    <a:p>
+                      <a:pPr algn="l" indent="0" marL="0">
+                        <a:buNone/>
+                      </a:pPr>
+                      <a:r>
+                        <a:rPr lang="en-US" sz="1300" b="1" dirty="0">
                           <a:solidFill>
                             <a:srgbClr val="1E2A35"/>
                           </a:solidFill>
@@ -34090,7 +34224,7 @@
                     <a:bodyPr/>
                     <a:lstStyle/>
                     <a:p>
-                      <a:pPr indent="0" marL="0">
+                      <a:pPr algn="l" indent="0" marL="0">
                         <a:buNone/>
                       </a:pPr>
                       <a:r>
@@ -34155,7 +34289,7 @@
                     <a:bodyPr/>
                     <a:lstStyle/>
                     <a:p>
-                      <a:pPr indent="0" marL="0">
+                      <a:pPr algn="l" indent="0" marL="0">
                         <a:buNone/>
                       </a:pPr>
                       <a:r>
@@ -34220,7 +34354,7 @@
                     <a:bodyPr/>
                     <a:lstStyle/>
                     <a:p>
-                      <a:pPr indent="0" marL="0">
+                      <a:pPr algn="l" indent="0" marL="0">
                         <a:buNone/>
                       </a:pPr>
                       <a:r>
@@ -34280,18 +34414,83 @@
                     </a:lnB>
                   </a:tcPr>
                 </a:tc>
-              </a:tr>
-              <a:tr h="502920">
                 <a:tc>
                   <a:txBody>
                     <a:bodyPr/>
                     <a:lstStyle/>
                     <a:p>
-                      <a:pPr indent="0" marL="0">
+                      <a:pPr algn="l" indent="0" marL="0">
                         <a:buNone/>
                       </a:pPr>
                       <a:r>
                         <a:rPr lang="en-US" sz="1300" dirty="0">
+                          <a:solidFill>
+                            <a:srgbClr val="1E2A35"/>
+                          </a:solidFill>
+                          <a:latin typeface="Calibri" pitchFamily="34" charset="0"/>
+                          <a:ea typeface="Calibri" pitchFamily="34" charset="-122"/>
+                          <a:cs typeface="Calibri" pitchFamily="34" charset="-120"/>
+                        </a:rPr>
+                        <a:t>Data produk: 100 produk dalam 4 kategori</a:t>
+                      </a:r>
+                      <a:endParaRPr lang="en-US" sz="1300" dirty="0">
+                        <a:latin typeface="Calibri" charset="0"/>
+                        <a:ea typeface="Calibri" charset="0"/>
+                        <a:cs typeface="Calibri" charset="0"/>
+                      </a:endParaRPr>
+                    </a:p>
+                  </a:txBody>
+                  <a:tcPr marL="91440" marR="91440" marT="45720" marB="45720" anchor="ctr">
+                    <a:lnL w="9525" cap="flat" cmpd="sng" algn="ctr">
+                      <a:solidFill>
+                        <a:srgbClr val="D5DDE3"/>
+                      </a:solidFill>
+                      <a:prstDash val="solid"/>
+                      <a:round/>
+                      <a:headEnd type="none" w="med" len="med"/>
+                      <a:tailEnd type="none" w="med" len="med"/>
+                    </a:lnL>
+                    <a:lnR w="9525" cap="flat" cmpd="sng" algn="ctr">
+                      <a:solidFill>
+                        <a:srgbClr val="D5DDE3"/>
+                      </a:solidFill>
+                      <a:prstDash val="solid"/>
+                      <a:round/>
+                      <a:headEnd type="none" w="med" len="med"/>
+                      <a:tailEnd type="none" w="med" len="med"/>
+                    </a:lnR>
+                    <a:lnT w="9525" cap="flat" cmpd="sng" algn="ctr">
+                      <a:solidFill>
+                        <a:srgbClr val="D5DDE3"/>
+                      </a:solidFill>
+                      <a:prstDash val="solid"/>
+                      <a:round/>
+                      <a:headEnd type="none" w="med" len="med"/>
+                      <a:tailEnd type="none" w="med" len="med"/>
+                    </a:lnT>
+                    <a:lnB w="9525" cap="flat" cmpd="sng" algn="ctr">
+                      <a:solidFill>
+                        <a:srgbClr val="D5DDE3"/>
+                      </a:solidFill>
+                      <a:prstDash val="solid"/>
+                      <a:round/>
+                      <a:headEnd type="none" w="med" len="med"/>
+                      <a:tailEnd type="none" w="med" len="med"/>
+                    </a:lnB>
+                  </a:tcPr>
+                </a:tc>
+              </a:tr>
+              <a:tr h="566928">
+                <a:tc>
+                  <a:txBody>
+                    <a:bodyPr/>
+                    <a:lstStyle/>
+                    <a:p>
+                      <a:pPr algn="l" indent="0" marL="0">
+                        <a:buNone/>
+                      </a:pPr>
+                      <a:r>
+                        <a:rPr lang="en-US" sz="1300" b="1" dirty="0">
                           <a:solidFill>
                             <a:srgbClr val="1E2A35"/>
                           </a:solidFill>
@@ -34352,7 +34551,7 @@
                     <a:bodyPr/>
                     <a:lstStyle/>
                     <a:p>
-                      <a:pPr indent="0" marL="0">
+                      <a:pPr algn="l" indent="0" marL="0">
                         <a:buNone/>
                       </a:pPr>
                       <a:r>
@@ -34417,7 +34616,7 @@
                     <a:bodyPr/>
                     <a:lstStyle/>
                     <a:p>
-                      <a:pPr indent="0" marL="0">
+                      <a:pPr algn="l" indent="0" marL="0">
                         <a:buNone/>
                       </a:pPr>
                       <a:r>
@@ -34482,7 +34681,7 @@
                     <a:bodyPr/>
                     <a:lstStyle/>
                     <a:p>
-                      <a:pPr indent="0" marL="0">
+                      <a:pPr algn="l" indent="0" marL="0">
                         <a:buNone/>
                       </a:pPr>
                       <a:r>
@@ -34542,14 +34741,79 @@
                     </a:lnB>
                   </a:tcPr>
                 </a:tc>
-              </a:tr>
-              <a:tr h="502920">
                 <a:tc>
                   <a:txBody>
                     <a:bodyPr/>
                     <a:lstStyle/>
                     <a:p>
-                      <a:pPr indent="0" marL="0">
+                      <a:pPr algn="l" indent="0" marL="0">
+                        <a:buNone/>
+                      </a:pPr>
+                      <a:r>
+                        <a:rPr lang="en-US" sz="1300" dirty="0">
+                          <a:solidFill>
+                            <a:srgbClr val="1E2A35"/>
+                          </a:solidFill>
+                          <a:latin typeface="Calibri" pitchFamily="34" charset="0"/>
+                          <a:ea typeface="Calibri" pitchFamily="34" charset="-122"/>
+                          <a:cs typeface="Calibri" pitchFamily="34" charset="-120"/>
+                        </a:rPr>
+                        <a:t>Tabel fakta: 1.000 transaksi, 30 Des 2023 sampai 28 Des 2024</a:t>
+                      </a:r>
+                      <a:endParaRPr lang="en-US" sz="1300" dirty="0">
+                        <a:latin typeface="Calibri" charset="0"/>
+                        <a:ea typeface="Calibri" charset="0"/>
+                        <a:cs typeface="Calibri" charset="0"/>
+                      </a:endParaRPr>
+                    </a:p>
+                  </a:txBody>
+                  <a:tcPr marL="91440" marR="91440" marT="45720" marB="45720" anchor="ctr">
+                    <a:lnL w="9525" cap="flat" cmpd="sng" algn="ctr">
+                      <a:solidFill>
+                        <a:srgbClr val="D5DDE3"/>
+                      </a:solidFill>
+                      <a:prstDash val="solid"/>
+                      <a:round/>
+                      <a:headEnd type="none" w="med" len="med"/>
+                      <a:tailEnd type="none" w="med" len="med"/>
+                    </a:lnL>
+                    <a:lnR w="9525" cap="flat" cmpd="sng" algn="ctr">
+                      <a:solidFill>
+                        <a:srgbClr val="D5DDE3"/>
+                      </a:solidFill>
+                      <a:prstDash val="solid"/>
+                      <a:round/>
+                      <a:headEnd type="none" w="med" len="med"/>
+                      <a:tailEnd type="none" w="med" len="med"/>
+                    </a:lnR>
+                    <a:lnT w="9525" cap="flat" cmpd="sng" algn="ctr">
+                      <a:solidFill>
+                        <a:srgbClr val="D5DDE3"/>
+                      </a:solidFill>
+                      <a:prstDash val="solid"/>
+                      <a:round/>
+                      <a:headEnd type="none" w="med" len="med"/>
+                      <a:tailEnd type="none" w="med" len="med"/>
+                    </a:lnT>
+                    <a:lnB w="9525" cap="flat" cmpd="sng" algn="ctr">
+                      <a:solidFill>
+                        <a:srgbClr val="D5DDE3"/>
+                      </a:solidFill>
+                      <a:prstDash val="solid"/>
+                      <a:round/>
+                      <a:headEnd type="none" w="med" len="med"/>
+                      <a:tailEnd type="none" w="med" len="med"/>
+                    </a:lnB>
+                  </a:tcPr>
+                </a:tc>
+              </a:tr>
+              <a:tr h="566928">
+                <a:tc>
+                  <a:txBody>
+                    <a:bodyPr/>
+                    <a:lstStyle/>
+                    <a:p>
+                      <a:pPr algn="l" indent="0" marL="0">
                         <a:buNone/>
                       </a:pPr>
                       <a:r>
@@ -34614,7 +34878,7 @@
                     <a:bodyPr/>
                     <a:lstStyle/>
                     <a:p>
-                      <a:pPr indent="0" marL="0">
+                      <a:pPr algn="l" indent="0" marL="0">
                         <a:buNone/>
                       </a:pPr>
                       <a:r>
@@ -34679,7 +34943,7 @@
                     <a:bodyPr/>
                     <a:lstStyle/>
                     <a:p>
-                      <a:pPr indent="0" marL="0">
+                      <a:pPr algn="l" indent="0" marL="0">
                         <a:buNone/>
                       </a:pPr>
                       <a:r>
@@ -34744,7 +35008,7 @@
                     <a:bodyPr/>
                     <a:lstStyle/>
                     <a:p>
-                      <a:pPr indent="0" marL="0">
+                      <a:pPr algn="l" indent="0" marL="0">
                         <a:buNone/>
                       </a:pPr>
                       <a:r>
@@ -34756,7 +35020,7 @@
                           <a:ea typeface="Calibri" pitchFamily="34" charset="-122"/>
                           <a:cs typeface="Calibri" pitchFamily="34" charset="-120"/>
                         </a:rPr>
-                        <a:t>12 variabel unik (CustomerID, ProductID, Price muncul di dua tabel)</a:t>
+                        <a:t>12 variabel unik</a:t>
                       </a:r>
                       <a:endParaRPr lang="en-US" sz="1300" dirty="0">
                         <a:latin typeface="Calibri" charset="0"/>
@@ -34804,6 +35068,71 @@
                     </a:lnB>
                   </a:tcPr>
                 </a:tc>
+                <a:tc>
+                  <a:txBody>
+                    <a:bodyPr/>
+                    <a:lstStyle/>
+                    <a:p>
+                      <a:pPr algn="l" indent="0" marL="0">
+                        <a:buNone/>
+                      </a:pPr>
+                      <a:r>
+                        <a:rPr lang="en-US" sz="1300" b="1" dirty="0">
+                          <a:solidFill>
+                            <a:srgbClr val="1E2A35"/>
+                          </a:solidFill>
+                          <a:latin typeface="Calibri" pitchFamily="34" charset="0"/>
+                          <a:ea typeface="Calibri" pitchFamily="34" charset="-122"/>
+                          <a:cs typeface="Calibri" pitchFamily="34" charset="-120"/>
+                        </a:rPr>
+                        <a:t>3 tabel; CustomerID, ProductID, Price muncul di dua tabel</a:t>
+                      </a:r>
+                      <a:endParaRPr lang="en-US" sz="1300" dirty="0">
+                        <a:latin typeface="Calibri" charset="0"/>
+                        <a:ea typeface="Calibri" charset="0"/>
+                        <a:cs typeface="Calibri" charset="0"/>
+                      </a:endParaRPr>
+                    </a:p>
+                  </a:txBody>
+                  <a:tcPr marL="91440" marR="91440" marT="45720" marB="45720" anchor="ctr">
+                    <a:lnL w="9525" cap="flat" cmpd="sng" algn="ctr">
+                      <a:solidFill>
+                        <a:srgbClr val="D5DDE3"/>
+                      </a:solidFill>
+                      <a:prstDash val="solid"/>
+                      <a:round/>
+                      <a:headEnd type="none" w="med" len="med"/>
+                      <a:tailEnd type="none" w="med" len="med"/>
+                    </a:lnL>
+                    <a:lnR w="9525" cap="flat" cmpd="sng" algn="ctr">
+                      <a:solidFill>
+                        <a:srgbClr val="D5DDE3"/>
+                      </a:solidFill>
+                      <a:prstDash val="solid"/>
+                      <a:round/>
+                      <a:headEnd type="none" w="med" len="med"/>
+                      <a:tailEnd type="none" w="med" len="med"/>
+                    </a:lnR>
+                    <a:lnT w="9525" cap="flat" cmpd="sng" algn="ctr">
+                      <a:solidFill>
+                        <a:srgbClr val="D5DDE3"/>
+                      </a:solidFill>
+                      <a:prstDash val="solid"/>
+                      <a:round/>
+                      <a:headEnd type="none" w="med" len="med"/>
+                      <a:tailEnd type="none" w="med" len="med"/>
+                    </a:lnT>
+                    <a:lnB w="9525" cap="flat" cmpd="sng" algn="ctr">
+                      <a:solidFill>
+                        <a:srgbClr val="D5DDE3"/>
+                      </a:solidFill>
+                      <a:prstDash val="solid"/>
+                      <a:round/>
+                      <a:headEnd type="none" w="med" len="med"/>
+                      <a:tailEnd type="none" w="med" len="med"/>
+                    </a:lnB>
+                  </a:tcPr>
+                </a:tc>
               </a:tr>
             </a:tbl>
           </a:graphicData>
@@ -34811,14 +35140,66 @@
       </p:graphicFrame>
       <p:sp>
         <p:nvSpPr>
-          <p:cNvPr id="12" name="Text 7"/>
+          <p:cNvPr id="12" name="Shape 7"/>
+          <p:cNvSpPr/>
+          <p:nvPr/>
+        </p:nvSpPr>
+        <p:spPr>
+          <a:xfrm>
+            <a:off x="548640" y="4251960"/>
+            <a:ext cx="11064240" cy="2057400"/>
+          </a:xfrm>
+          <a:prstGeom prst="roundRect">
+            <a:avLst>
+              <a:gd name="adj" fmla="val 4444"/>
+            </a:avLst>
+          </a:prstGeom>
+          <a:solidFill>
+            <a:srgbClr val="E8F5F7"/>
+          </a:solidFill>
+          <a:ln w="12700">
+            <a:solidFill>
+              <a:srgbClr val="E8F5F7"/>
+            </a:solidFill>
+            <a:prstDash val="solid"/>
+          </a:ln>
+        </p:spPr>
+      </p:sp>
+      <p:sp>
+        <p:nvSpPr>
+          <p:cNvPr id="13" name="Shape 8"/>
+          <p:cNvSpPr/>
+          <p:nvPr/>
+        </p:nvSpPr>
+        <p:spPr>
+          <a:xfrm>
+            <a:off x="548640" y="4343400"/>
+            <a:ext cx="82296" cy="1874520"/>
+          </a:xfrm>
+          <a:prstGeom prst="rect">
+            <a:avLst/>
+          </a:prstGeom>
+          <a:solidFill>
+            <a:srgbClr val="1B9AAA"/>
+          </a:solidFill>
+          <a:ln w="12700">
+            <a:solidFill>
+              <a:srgbClr val="1B9AAA"/>
+            </a:solidFill>
+            <a:prstDash val="solid"/>
+          </a:ln>
+        </p:spPr>
+      </p:sp>
+      <p:sp>
+        <p:nvSpPr>
+          <p:cNvPr id="14" name="Text 9"/>
           <p:cNvSpPr txBox="1"/>
           <p:nvPr/>
         </p:nvSpPr>
         <p:spPr>
           <a:xfrm>
-            <a:off x="548640" y="4114800"/>
-            <a:ext cx="2103120" cy="731520"/>
+            <a:off x="777240" y="4389120"/>
+            <a:ext cx="10652760" cy="411480"/>
           </a:xfrm>
           <a:prstGeom prst="rect">
             <a:avLst/>
@@ -34834,7 +35215,7 @@
               <a:buNone/>
             </a:pPr>
             <a:r>
-              <a:rPr lang="en-US" sz="4000" b="1" dirty="0">
+              <a:rPr lang="en-US" sz="1700" b="1" dirty="0">
                 <a:solidFill>
                   <a:srgbClr val="1B9AAA"/>
                 </a:solidFill>
@@ -34842,22 +35223,22 @@
                 <a:ea typeface="Cambria" pitchFamily="34" charset="-122"/>
                 <a:cs typeface="Cambria" pitchFamily="34" charset="-120"/>
               </a:rPr>
-              <a:t>15</a:t>
-            </a:r>
-            <a:endParaRPr lang="en-US" sz="4000" dirty="0"/>
+              <a:t>Penjelasan</a:t>
+            </a:r>
+            <a:endParaRPr lang="en-US" sz="1700" dirty="0"/>
           </a:p>
         </p:txBody>
       </p:sp>
       <p:sp>
         <p:nvSpPr>
-          <p:cNvPr id="13" name="Text 8"/>
+          <p:cNvPr id="15" name="Text 10"/>
           <p:cNvSpPr txBox="1"/>
           <p:nvPr/>
         </p:nvSpPr>
         <p:spPr>
           <a:xfrm>
-            <a:off x="548640" y="4846320"/>
-            <a:ext cx="2103120" cy="457200"/>
+            <a:off x="777240" y="4892040"/>
+            <a:ext cx="10652760" cy="1280160"/>
           </a:xfrm>
           <a:prstGeom prst="rect">
             <a:avLst/>
@@ -34869,370 +35250,86 @@
           <a:bodyPr wrap="square" lIns="0" tIns="0" rIns="0" bIns="0" rtlCol="0" anchor="t"/>
           <a:lstStyle/>
           <a:p>
-            <a:pPr indent="0" marL="0">
-              <a:buNone/>
+            <a:pPr marL="177800" indent="-177800">
+              <a:spcAft>
+                <a:spcPts val="600"/>
+              </a:spcAft>
+              <a:buSzPct val="100000"/>
+              <a:buChar char="•"/>
             </a:pPr>
             <a:r>
               <a:rPr lang="en-US" sz="1300" dirty="0">
                 <a:solidFill>
-                  <a:srgbClr val="5B6B79"/>
+                  <a:srgbClr val="1E2A35"/>
                 </a:solidFill>
                 <a:latin typeface="Calibri" pitchFamily="34" charset="0"/>
                 <a:ea typeface="Calibri" pitchFamily="34" charset="-122"/>
                 <a:cs typeface="Calibri" pitchFamily="34" charset="-120"/>
               </a:rPr>
-              <a:t>kolom (12 variabel unik)</a:t>
+              <a:t>Dataset EverMart berbentuk model bintang: Transactions (pusat) terhubung ke Customers lewat CustomerID dan ke Products lewat ProductID.</a:t>
             </a:r>
             <a:endParaRPr lang="en-US" sz="1300" dirty="0"/>
           </a:p>
-        </p:txBody>
-      </p:sp>
-      <p:sp>
-        <p:nvSpPr>
-          <p:cNvPr id="14" name="Text 9"/>
-          <p:cNvSpPr txBox="1"/>
-          <p:nvPr/>
-        </p:nvSpPr>
-        <p:spPr>
-          <a:xfrm>
-            <a:off x="2834640" y="4114800"/>
-            <a:ext cx="2103120" cy="731520"/>
-          </a:xfrm>
-          <a:prstGeom prst="rect">
-            <a:avLst/>
-          </a:prstGeom>
-          <a:noFill/>
-          <a:ln/>
-        </p:spPr>
-        <p:txBody>
-          <a:bodyPr wrap="square" lIns="0" tIns="0" rIns="0" bIns="0" rtlCol="0" anchor="ctr"/>
-          <a:lstStyle/>
-          <a:p>
-            <a:pPr indent="0" marL="0">
-              <a:buNone/>
-            </a:pPr>
-            <a:r>
-              <a:rPr lang="en-US" sz="4000" b="1" dirty="0">
-                <a:solidFill>
-                  <a:srgbClr val="E8832B"/>
-                </a:solidFill>
-                <a:latin typeface="Cambria" pitchFamily="34" charset="0"/>
-                <a:ea typeface="Cambria" pitchFamily="34" charset="-122"/>
-                <a:cs typeface="Cambria" pitchFamily="34" charset="-120"/>
-              </a:rPr>
-              <a:t>1.000</a:t>
-            </a:r>
-            <a:endParaRPr lang="en-US" sz="4000" dirty="0"/>
-          </a:p>
-        </p:txBody>
-      </p:sp>
-      <p:sp>
-        <p:nvSpPr>
-          <p:cNvPr id="15" name="Text 10"/>
-          <p:cNvSpPr txBox="1"/>
-          <p:nvPr/>
-        </p:nvSpPr>
-        <p:spPr>
-          <a:xfrm>
-            <a:off x="2834640" y="4846320"/>
-            <a:ext cx="2103120" cy="457200"/>
-          </a:xfrm>
-          <a:prstGeom prst="rect">
-            <a:avLst/>
-          </a:prstGeom>
-          <a:noFill/>
-          <a:ln/>
-        </p:spPr>
-        <p:txBody>
-          <a:bodyPr wrap="square" lIns="0" tIns="0" rIns="0" bIns="0" rtlCol="0" anchor="t"/>
-          <a:lstStyle/>
-          <a:p>
-            <a:pPr indent="0" marL="0">
-              <a:buNone/>
+          <a:p>
+            <a:pPr marL="177800" indent="-177800">
+              <a:spcAft>
+                <a:spcPts val="600"/>
+              </a:spcAft>
+              <a:buSzPct val="100000"/>
+              <a:buChar char="•"/>
             </a:pPr>
             <a:r>
               <a:rPr lang="en-US" sz="1300" dirty="0">
                 <a:solidFill>
-                  <a:srgbClr val="5B6B79"/>
+                  <a:srgbClr val="1E2A35"/>
                 </a:solidFill>
                 <a:latin typeface="Calibri" pitchFamily="34" charset="0"/>
                 <a:ea typeface="Calibri" pitchFamily="34" charset="-122"/>
                 <a:cs typeface="Calibri" pitchFamily="34" charset="-120"/>
               </a:rPr>
-              <a:t>transaksi</a:t>
+              <a:t>Total 15 kolom (4 + 4 + 7); variabel unik 12 karena CustomerID, ProductID, dan Price muncul di dua tabel.</a:t>
             </a:r>
             <a:endParaRPr lang="en-US" sz="1300" dirty="0"/>
           </a:p>
-        </p:txBody>
-      </p:sp>
-      <p:sp>
-        <p:nvSpPr>
-          <p:cNvPr id="16" name="Text 11"/>
-          <p:cNvSpPr txBox="1"/>
-          <p:nvPr/>
-        </p:nvSpPr>
-        <p:spPr>
-          <a:xfrm>
-            <a:off x="5120640" y="4114800"/>
-            <a:ext cx="2103120" cy="731520"/>
-          </a:xfrm>
-          <a:prstGeom prst="rect">
-            <a:avLst/>
-          </a:prstGeom>
-          <a:noFill/>
-          <a:ln/>
-        </p:spPr>
-        <p:txBody>
-          <a:bodyPr wrap="square" lIns="0" tIns="0" rIns="0" bIns="0" rtlCol="0" anchor="ctr"/>
-          <a:lstStyle/>
-          <a:p>
-            <a:pPr indent="0" marL="0">
-              <a:buNone/>
-            </a:pPr>
-            <a:r>
-              <a:rPr lang="en-US" sz="4000" b="1" dirty="0">
-                <a:solidFill>
-                  <a:srgbClr val="1A0683"/>
-                </a:solidFill>
-                <a:latin typeface="Cambria" pitchFamily="34" charset="0"/>
-                <a:ea typeface="Cambria" pitchFamily="34" charset="-122"/>
-                <a:cs typeface="Cambria" pitchFamily="34" charset="-120"/>
-              </a:rPr>
-              <a:t>200</a:t>
-            </a:r>
-            <a:endParaRPr lang="en-US" sz="4000" dirty="0"/>
-          </a:p>
-        </p:txBody>
-      </p:sp>
-      <p:sp>
-        <p:nvSpPr>
-          <p:cNvPr id="17" name="Text 12"/>
-          <p:cNvSpPr txBox="1"/>
-          <p:nvPr/>
-        </p:nvSpPr>
-        <p:spPr>
-          <a:xfrm>
-            <a:off x="5120640" y="4846320"/>
-            <a:ext cx="2103120" cy="457200"/>
-          </a:xfrm>
-          <a:prstGeom prst="rect">
-            <a:avLst/>
-          </a:prstGeom>
-          <a:noFill/>
-          <a:ln/>
-        </p:spPr>
-        <p:txBody>
-          <a:bodyPr wrap="square" lIns="0" tIns="0" rIns="0" bIns="0" rtlCol="0" anchor="t"/>
-          <a:lstStyle/>
-          <a:p>
-            <a:pPr indent="0" marL="0">
-              <a:buNone/>
+          <a:p>
+            <a:pPr marL="177800" indent="-177800">
+              <a:spcAft>
+                <a:spcPts val="600"/>
+              </a:spcAft>
+              <a:buSzPct val="100000"/>
+              <a:buChar char="•"/>
             </a:pPr>
             <a:r>
               <a:rPr lang="en-US" sz="1300" dirty="0">
                 <a:solidFill>
-                  <a:srgbClr val="5B6B79"/>
+                  <a:srgbClr val="1E2A35"/>
                 </a:solidFill>
                 <a:latin typeface="Calibri" pitchFamily="34" charset="0"/>
                 <a:ea typeface="Calibri" pitchFamily="34" charset="-122"/>
                 <a:cs typeface="Calibri" pitchFamily="34" charset="-120"/>
               </a:rPr>
-              <a:t>pelanggan terdaftar</a:t>
+              <a:t>Pelanggan: 200 terdaftar, 199 bertransaksi, 1 terdaftar tetapi belum bertransaksi (C0180 Amy Carpenter, Asia).</a:t>
             </a:r>
             <a:endParaRPr lang="en-US" sz="1300" dirty="0"/>
           </a:p>
-        </p:txBody>
-      </p:sp>
-      <p:sp>
-        <p:nvSpPr>
-          <p:cNvPr id="18" name="Text 13"/>
-          <p:cNvSpPr txBox="1"/>
-          <p:nvPr/>
-        </p:nvSpPr>
-        <p:spPr>
-          <a:xfrm>
-            <a:off x="7406640" y="4114800"/>
-            <a:ext cx="2103120" cy="731520"/>
-          </a:xfrm>
-          <a:prstGeom prst="rect">
-            <a:avLst/>
-          </a:prstGeom>
-          <a:noFill/>
-          <a:ln/>
-        </p:spPr>
-        <p:txBody>
-          <a:bodyPr wrap="square" lIns="0" tIns="0" rIns="0" bIns="0" rtlCol="0" anchor="ctr"/>
-          <a:lstStyle/>
-          <a:p>
-            <a:pPr indent="0" marL="0">
-              <a:buNone/>
-            </a:pPr>
-            <a:r>
-              <a:rPr lang="en-US" sz="4000" b="1" dirty="0">
-                <a:solidFill>
-                  <a:srgbClr val="1B9AAA"/>
-                </a:solidFill>
-                <a:latin typeface="Cambria" pitchFamily="34" charset="0"/>
-                <a:ea typeface="Cambria" pitchFamily="34" charset="-122"/>
-                <a:cs typeface="Cambria" pitchFamily="34" charset="-120"/>
-              </a:rPr>
-              <a:t>199</a:t>
-            </a:r>
-            <a:endParaRPr lang="en-US" sz="4000" dirty="0"/>
-          </a:p>
-        </p:txBody>
-      </p:sp>
-      <p:sp>
-        <p:nvSpPr>
-          <p:cNvPr id="19" name="Text 14"/>
-          <p:cNvSpPr txBox="1"/>
-          <p:nvPr/>
-        </p:nvSpPr>
-        <p:spPr>
-          <a:xfrm>
-            <a:off x="7406640" y="4846320"/>
-            <a:ext cx="2103120" cy="457200"/>
-          </a:xfrm>
-          <a:prstGeom prst="rect">
-            <a:avLst/>
-          </a:prstGeom>
-          <a:noFill/>
-          <a:ln/>
-        </p:spPr>
-        <p:txBody>
-          <a:bodyPr wrap="square" lIns="0" tIns="0" rIns="0" bIns="0" rtlCol="0" anchor="t"/>
-          <a:lstStyle/>
-          <a:p>
-            <a:pPr indent="0" marL="0">
-              <a:buNone/>
+          <a:p>
+            <a:pPr marL="177800" indent="-177800">
+              <a:spcAft>
+                <a:spcPts val="600"/>
+              </a:spcAft>
+              <a:buSzPct val="100000"/>
+              <a:buChar char="•"/>
             </a:pPr>
             <a:r>
               <a:rPr lang="en-US" sz="1300" dirty="0">
                 <a:solidFill>
-                  <a:srgbClr val="5B6B79"/>
+                  <a:srgbClr val="1E2A35"/>
                 </a:solidFill>
                 <a:latin typeface="Calibri" pitchFamily="34" charset="0"/>
                 <a:ea typeface="Calibri" pitchFamily="34" charset="-122"/>
                 <a:cs typeface="Calibri" pitchFamily="34" charset="-120"/>
               </a:rPr>
-              <a:t>pelanggan bertransaksi</a:t>
-            </a:r>
-            <a:endParaRPr lang="en-US" sz="1300" dirty="0"/>
-          </a:p>
-        </p:txBody>
-      </p:sp>
-      <p:sp>
-        <p:nvSpPr>
-          <p:cNvPr id="20" name="Text 15"/>
-          <p:cNvSpPr txBox="1"/>
-          <p:nvPr/>
-        </p:nvSpPr>
-        <p:spPr>
-          <a:xfrm>
-            <a:off x="9692640" y="4114800"/>
-            <a:ext cx="2103120" cy="731520"/>
-          </a:xfrm>
-          <a:prstGeom prst="rect">
-            <a:avLst/>
-          </a:prstGeom>
-          <a:noFill/>
-          <a:ln/>
-        </p:spPr>
-        <p:txBody>
-          <a:bodyPr wrap="square" lIns="0" tIns="0" rIns="0" bIns="0" rtlCol="0" anchor="ctr"/>
-          <a:lstStyle/>
-          <a:p>
-            <a:pPr indent="0" marL="0">
-              <a:buNone/>
-            </a:pPr>
-            <a:r>
-              <a:rPr lang="en-US" sz="4000" b="1" dirty="0">
-                <a:solidFill>
-                  <a:srgbClr val="E8832B"/>
-                </a:solidFill>
-                <a:latin typeface="Cambria" pitchFamily="34" charset="0"/>
-                <a:ea typeface="Cambria" pitchFamily="34" charset="-122"/>
-                <a:cs typeface="Cambria" pitchFamily="34" charset="-120"/>
-              </a:rPr>
-              <a:t>1</a:t>
-            </a:r>
-            <a:endParaRPr lang="en-US" sz="4000" dirty="0"/>
-          </a:p>
-        </p:txBody>
-      </p:sp>
-      <p:sp>
-        <p:nvSpPr>
-          <p:cNvPr id="21" name="Text 16"/>
-          <p:cNvSpPr txBox="1"/>
-          <p:nvPr/>
-        </p:nvSpPr>
-        <p:spPr>
-          <a:xfrm>
-            <a:off x="9692640" y="4846320"/>
-            <a:ext cx="2103120" cy="457200"/>
-          </a:xfrm>
-          <a:prstGeom prst="rect">
-            <a:avLst/>
-          </a:prstGeom>
-          <a:noFill/>
-          <a:ln/>
-        </p:spPr>
-        <p:txBody>
-          <a:bodyPr wrap="square" lIns="0" tIns="0" rIns="0" bIns="0" rtlCol="0" anchor="t"/>
-          <a:lstStyle/>
-          <a:p>
-            <a:pPr indent="0" marL="0">
-              <a:buNone/>
-            </a:pPr>
-            <a:r>
-              <a:rPr lang="en-US" sz="1300" dirty="0">
-                <a:solidFill>
-                  <a:srgbClr val="5B6B79"/>
-                </a:solidFill>
-                <a:latin typeface="Calibri" pitchFamily="34" charset="0"/>
-                <a:ea typeface="Calibri" pitchFamily="34" charset="-122"/>
-                <a:cs typeface="Calibri" pitchFamily="34" charset="-120"/>
-              </a:rPr>
-              <a:t>terdaftar, belum bertransaksi</a:t>
-            </a:r>
-            <a:endParaRPr lang="en-US" sz="1300" dirty="0"/>
-          </a:p>
-        </p:txBody>
-      </p:sp>
-      <p:sp>
-        <p:nvSpPr>
-          <p:cNvPr id="22" name="Text 17"/>
-          <p:cNvSpPr txBox="1"/>
-          <p:nvPr/>
-        </p:nvSpPr>
-        <p:spPr>
-          <a:xfrm>
-            <a:off x="548640" y="5715000"/>
-            <a:ext cx="11064240" cy="640080"/>
-          </a:xfrm>
-          <a:prstGeom prst="rect">
-            <a:avLst/>
-          </a:prstGeom>
-          <a:noFill/>
-          <a:ln/>
-        </p:spPr>
-        <p:txBody>
-          <a:bodyPr wrap="square" lIns="0" tIns="0" rIns="0" bIns="0" rtlCol="0" anchor="t"/>
-          <a:lstStyle/>
-          <a:p>
-            <a:pPr indent="0" marL="0">
-              <a:buNone/>
-            </a:pPr>
-            <a:r>
-              <a:rPr lang="en-US" sz="1300" dirty="0">
-                <a:solidFill>
-                  <a:srgbClr val="5B6B79"/>
-                </a:solidFill>
-                <a:latin typeface="Calibri" pitchFamily="34" charset="0"/>
-                <a:ea typeface="Calibri" pitchFamily="34" charset="-122"/>
-                <a:cs typeface="Calibri" pitchFamily="34" charset="-120"/>
-              </a:rPr>
-              <a:t>Periode 30 Desember 2023 sampai 28 Desember 2024 (996 dari 1.000 transaksi berada di 2024). Model bintang: Transactions terhubung ke Customers (CustomerID) dan Products (ProductID).</a:t>
+              <a:t>Periode transaksi 30 Desember 2023 sampai 28 Desember 2024; 996 dari 1.000 transaksi berada di tahun 2024.</a:t>
             </a:r>
             <a:endParaRPr lang="en-US" sz="1300" dirty="0"/>
           </a:p>

--- a/output/UTS_BDASC_Francisco_Correia_Soares.pptx
+++ b/output/UTS_BDASC_Francisco_Correia_Soares.pptx
@@ -14155,33 +14155,60 @@
         </p:nvSpPr>
         <p:spPr>
           <a:xfrm>
-            <a:off x="548640" y="1280160"/>
-            <a:ext cx="6949440" cy="4114800"/>
-          </a:xfrm>
-          <a:prstGeom prst="rect">
-            <a:avLst/>
+            <a:off x="548640" y="1371600"/>
+            <a:ext cx="2103120" cy="2468880"/>
+          </a:xfrm>
+          <a:prstGeom prst="roundRect">
+            <a:avLst>
+              <a:gd name="adj" fmla="val 4348"/>
+            </a:avLst>
           </a:prstGeom>
           <a:solidFill>
             <a:srgbClr val="FFFFFF"/>
           </a:solidFill>
-          <a:ln w="22225">
+          <a:ln w="31750">
             <a:solidFill>
-              <a:srgbClr val="6A2C9C"/>
+              <a:srgbClr val="1B9AAA"/>
             </a:solidFill>
-            <a:prstDash val="dash"/>
+            <a:prstDash val="solid"/>
           </a:ln>
         </p:spPr>
       </p:sp>
       <p:sp>
         <p:nvSpPr>
-          <p:cNvPr id="12" name="Text 8"/>
+          <p:cNvPr id="12" name="Shape 8"/>
+          <p:cNvSpPr/>
+          <p:nvPr/>
+        </p:nvSpPr>
+        <p:spPr>
+          <a:xfrm>
+            <a:off x="548640" y="1371600"/>
+            <a:ext cx="2103120" cy="502920"/>
+          </a:xfrm>
+          <a:prstGeom prst="rect">
+            <a:avLst/>
+          </a:prstGeom>
+          <a:solidFill>
+            <a:srgbClr val="1B9AAA"/>
+          </a:solidFill>
+          <a:ln w="12700">
+            <a:solidFill>
+              <a:srgbClr val="1B9AAA"/>
+            </a:solidFill>
+            <a:prstDash val="solid"/>
+          </a:ln>
+        </p:spPr>
+      </p:sp>
+      <p:sp>
+        <p:nvSpPr>
+          <p:cNvPr id="13" name="Text 9"/>
           <p:cNvSpPr txBox="1"/>
           <p:nvPr/>
         </p:nvSpPr>
         <p:spPr>
           <a:xfrm>
-            <a:off x="822960" y="1280160"/>
-            <a:ext cx="6400800" cy="4114800"/>
+            <a:off x="548640" y="1371600"/>
+            <a:ext cx="2103120" cy="502920"/>
           </a:xfrm>
           <a:prstGeom prst="rect">
             <a:avLst/>
@@ -14197,64 +14224,696 @@
               <a:buNone/>
             </a:pPr>
             <a:r>
-              <a:rPr lang="en-US" sz="1200" b="1" dirty="0">
-                <a:solidFill>
-                  <a:srgbClr val="6A2C9C"/>
+              <a:rPr lang="en-US" sz="1500" b="1" dirty="0">
+                <a:solidFill>
+                  <a:srgbClr val="FFFFFF"/>
+                </a:solidFill>
+                <a:latin typeface="Cambria" pitchFamily="34" charset="0"/>
+                <a:ea typeface="Cambria" pitchFamily="34" charset="-122"/>
+                <a:cs typeface="Cambria" pitchFamily="34" charset="-120"/>
+              </a:rPr>
+              <a:t>Customers</a:t>
+            </a:r>
+            <a:endParaRPr lang="en-US" sz="1500" dirty="0"/>
+          </a:p>
+        </p:txBody>
+      </p:sp>
+      <p:sp>
+        <p:nvSpPr>
+          <p:cNvPr id="14" name="Text 10"/>
+          <p:cNvSpPr txBox="1"/>
+          <p:nvPr/>
+        </p:nvSpPr>
+        <p:spPr>
+          <a:xfrm>
+            <a:off x="685800" y="1965960"/>
+            <a:ext cx="1828800" cy="1783080"/>
+          </a:xfrm>
+          <a:prstGeom prst="rect">
+            <a:avLst/>
+          </a:prstGeom>
+          <a:noFill/>
+          <a:ln/>
+        </p:spPr>
+        <p:txBody>
+          <a:bodyPr wrap="square" lIns="0" tIns="0" rIns="0" bIns="0" rtlCol="0" anchor="t"/>
+          <a:lstStyle/>
+          <a:p>
+            <a:pPr indent="0" marL="0">
+              <a:buNone/>
+            </a:pPr>
+            <a:r>
+              <a:rPr lang="en-US" sz="1100" dirty="0">
+                <a:solidFill>
+                  <a:srgbClr val="1E2A35"/>
+                </a:solidFill>
+                <a:latin typeface="Courier New" pitchFamily="34" charset="0"/>
+                <a:ea typeface="Courier New" pitchFamily="34" charset="-122"/>
+                <a:cs typeface="Courier New" pitchFamily="34" charset="-120"/>
+              </a:rPr>
+              <a:t>CustomerID (PK)</a:t>
+            </a:r>
+            <a:endParaRPr lang="en-US" sz="1100" dirty="0"/>
+          </a:p>
+          <a:p>
+            <a:pPr indent="0" marL="0">
+              <a:buNone/>
+            </a:pPr>
+            <a:r>
+              <a:rPr lang="en-US" sz="1100" dirty="0">
+                <a:solidFill>
+                  <a:srgbClr val="1E2A35"/>
+                </a:solidFill>
+                <a:latin typeface="Courier New" pitchFamily="34" charset="0"/>
+                <a:ea typeface="Courier New" pitchFamily="34" charset="-122"/>
+                <a:cs typeface="Courier New" pitchFamily="34" charset="-120"/>
+              </a:rPr>
+              <a:t>CustomerName</a:t>
+            </a:r>
+            <a:endParaRPr lang="en-US" sz="1100" dirty="0"/>
+          </a:p>
+          <a:p>
+            <a:pPr indent="0" marL="0">
+              <a:buNone/>
+            </a:pPr>
+            <a:r>
+              <a:rPr lang="en-US" sz="1100" dirty="0">
+                <a:solidFill>
+                  <a:srgbClr val="1E2A35"/>
+                </a:solidFill>
+                <a:latin typeface="Courier New" pitchFamily="34" charset="0"/>
+                <a:ea typeface="Courier New" pitchFamily="34" charset="-122"/>
+                <a:cs typeface="Courier New" pitchFamily="34" charset="-120"/>
+              </a:rPr>
+              <a:t>Region</a:t>
+            </a:r>
+            <a:endParaRPr lang="en-US" sz="1100" dirty="0"/>
+          </a:p>
+          <a:p>
+            <a:pPr indent="0" marL="0">
+              <a:buNone/>
+            </a:pPr>
+            <a:r>
+              <a:rPr lang="en-US" sz="1100" dirty="0">
+                <a:solidFill>
+                  <a:srgbClr val="1E2A35"/>
+                </a:solidFill>
+                <a:latin typeface="Courier New" pitchFamily="34" charset="0"/>
+                <a:ea typeface="Courier New" pitchFamily="34" charset="-122"/>
+                <a:cs typeface="Courier New" pitchFamily="34" charset="-120"/>
+              </a:rPr>
+              <a:t>SignupDate</a:t>
+            </a:r>
+            <a:endParaRPr lang="en-US" sz="1100" dirty="0"/>
+          </a:p>
+        </p:txBody>
+      </p:sp>
+      <p:sp>
+        <p:nvSpPr>
+          <p:cNvPr id="15" name="Shape 11"/>
+          <p:cNvSpPr/>
+          <p:nvPr/>
+        </p:nvSpPr>
+        <p:spPr>
+          <a:xfrm>
+            <a:off x="3246120" y="1371600"/>
+            <a:ext cx="2286000" cy="3200400"/>
+          </a:xfrm>
+          <a:prstGeom prst="roundRect">
+            <a:avLst>
+              <a:gd name="adj" fmla="val 4000"/>
+            </a:avLst>
+          </a:prstGeom>
+          <a:solidFill>
+            <a:srgbClr val="FFFFFF"/>
+          </a:solidFill>
+          <a:ln w="31750">
+            <a:solidFill>
+              <a:srgbClr val="1A0683"/>
+            </a:solidFill>
+            <a:prstDash val="solid"/>
+          </a:ln>
+        </p:spPr>
+      </p:sp>
+      <p:sp>
+        <p:nvSpPr>
+          <p:cNvPr id="16" name="Shape 12"/>
+          <p:cNvSpPr/>
+          <p:nvPr/>
+        </p:nvSpPr>
+        <p:spPr>
+          <a:xfrm>
+            <a:off x="3246120" y="1371600"/>
+            <a:ext cx="2286000" cy="502920"/>
+          </a:xfrm>
+          <a:prstGeom prst="rect">
+            <a:avLst/>
+          </a:prstGeom>
+          <a:solidFill>
+            <a:srgbClr val="1A0683"/>
+          </a:solidFill>
+          <a:ln w="12700">
+            <a:solidFill>
+              <a:srgbClr val="1A0683"/>
+            </a:solidFill>
+            <a:prstDash val="solid"/>
+          </a:ln>
+        </p:spPr>
+      </p:sp>
+      <p:sp>
+        <p:nvSpPr>
+          <p:cNvPr id="17" name="Text 13"/>
+          <p:cNvSpPr txBox="1"/>
+          <p:nvPr/>
+        </p:nvSpPr>
+        <p:spPr>
+          <a:xfrm>
+            <a:off x="3246120" y="1371600"/>
+            <a:ext cx="2286000" cy="502920"/>
+          </a:xfrm>
+          <a:prstGeom prst="rect">
+            <a:avLst/>
+          </a:prstGeom>
+          <a:noFill/>
+          <a:ln/>
+        </p:spPr>
+        <p:txBody>
+          <a:bodyPr wrap="square" lIns="0" tIns="0" rIns="0" bIns="0" rtlCol="0" anchor="ctr"/>
+          <a:lstStyle/>
+          <a:p>
+            <a:pPr algn="ctr" indent="0" marL="0">
+              <a:buNone/>
+            </a:pPr>
+            <a:r>
+              <a:rPr lang="en-US" sz="1500" b="1" dirty="0">
+                <a:solidFill>
+                  <a:srgbClr val="FFFFFF"/>
+                </a:solidFill>
+                <a:latin typeface="Cambria" pitchFamily="34" charset="0"/>
+                <a:ea typeface="Cambria" pitchFamily="34" charset="-122"/>
+                <a:cs typeface="Cambria" pitchFamily="34" charset="-120"/>
+              </a:rPr>
+              <a:t>Transactions</a:t>
+            </a:r>
+            <a:endParaRPr lang="en-US" sz="1500" dirty="0"/>
+          </a:p>
+        </p:txBody>
+      </p:sp>
+      <p:sp>
+        <p:nvSpPr>
+          <p:cNvPr id="18" name="Text 14"/>
+          <p:cNvSpPr txBox="1"/>
+          <p:nvPr/>
+        </p:nvSpPr>
+        <p:spPr>
+          <a:xfrm>
+            <a:off x="3383280" y="1965960"/>
+            <a:ext cx="2011680" cy="2514600"/>
+          </a:xfrm>
+          <a:prstGeom prst="rect">
+            <a:avLst/>
+          </a:prstGeom>
+          <a:noFill/>
+          <a:ln/>
+        </p:spPr>
+        <p:txBody>
+          <a:bodyPr wrap="square" lIns="0" tIns="0" rIns="0" bIns="0" rtlCol="0" anchor="t"/>
+          <a:lstStyle/>
+          <a:p>
+            <a:pPr indent="0" marL="0">
+              <a:buNone/>
+            </a:pPr>
+            <a:r>
+              <a:rPr lang="en-US" sz="1100" dirty="0">
+                <a:solidFill>
+                  <a:srgbClr val="1E2A35"/>
+                </a:solidFill>
+                <a:latin typeface="Courier New" pitchFamily="34" charset="0"/>
+                <a:ea typeface="Courier New" pitchFamily="34" charset="-122"/>
+                <a:cs typeface="Courier New" pitchFamily="34" charset="-120"/>
+              </a:rPr>
+              <a:t>TransactionID (PK)</a:t>
+            </a:r>
+            <a:endParaRPr lang="en-US" sz="1100" dirty="0"/>
+          </a:p>
+          <a:p>
+            <a:pPr indent="0" marL="0">
+              <a:buNone/>
+            </a:pPr>
+            <a:r>
+              <a:rPr lang="en-US" sz="1100" dirty="0">
+                <a:solidFill>
+                  <a:srgbClr val="1E2A35"/>
+                </a:solidFill>
+                <a:latin typeface="Courier New" pitchFamily="34" charset="0"/>
+                <a:ea typeface="Courier New" pitchFamily="34" charset="-122"/>
+                <a:cs typeface="Courier New" pitchFamily="34" charset="-120"/>
+              </a:rPr>
+              <a:t>CustomerID (FK)</a:t>
+            </a:r>
+            <a:endParaRPr lang="en-US" sz="1100" dirty="0"/>
+          </a:p>
+          <a:p>
+            <a:pPr indent="0" marL="0">
+              <a:buNone/>
+            </a:pPr>
+            <a:r>
+              <a:rPr lang="en-US" sz="1100" dirty="0">
+                <a:solidFill>
+                  <a:srgbClr val="1E2A35"/>
+                </a:solidFill>
+                <a:latin typeface="Courier New" pitchFamily="34" charset="0"/>
+                <a:ea typeface="Courier New" pitchFamily="34" charset="-122"/>
+                <a:cs typeface="Courier New" pitchFamily="34" charset="-120"/>
+              </a:rPr>
+              <a:t>ProductID (FK)</a:t>
+            </a:r>
+            <a:endParaRPr lang="en-US" sz="1100" dirty="0"/>
+          </a:p>
+          <a:p>
+            <a:pPr indent="0" marL="0">
+              <a:buNone/>
+            </a:pPr>
+            <a:r>
+              <a:rPr lang="en-US" sz="1100" dirty="0">
+                <a:solidFill>
+                  <a:srgbClr val="1E2A35"/>
+                </a:solidFill>
+                <a:latin typeface="Courier New" pitchFamily="34" charset="0"/>
+                <a:ea typeface="Courier New" pitchFamily="34" charset="-122"/>
+                <a:cs typeface="Courier New" pitchFamily="34" charset="-120"/>
+              </a:rPr>
+              <a:t>TransactionDate</a:t>
+            </a:r>
+            <a:endParaRPr lang="en-US" sz="1100" dirty="0"/>
+          </a:p>
+          <a:p>
+            <a:pPr indent="0" marL="0">
+              <a:buNone/>
+            </a:pPr>
+            <a:r>
+              <a:rPr lang="en-US" sz="1100" dirty="0">
+                <a:solidFill>
+                  <a:srgbClr val="1E2A35"/>
+                </a:solidFill>
+                <a:latin typeface="Courier New" pitchFamily="34" charset="0"/>
+                <a:ea typeface="Courier New" pitchFamily="34" charset="-122"/>
+                <a:cs typeface="Courier New" pitchFamily="34" charset="-120"/>
+              </a:rPr>
+              <a:t>Quantity</a:t>
+            </a:r>
+            <a:endParaRPr lang="en-US" sz="1100" dirty="0"/>
+          </a:p>
+          <a:p>
+            <a:pPr indent="0" marL="0">
+              <a:buNone/>
+            </a:pPr>
+            <a:r>
+              <a:rPr lang="en-US" sz="1100" dirty="0">
+                <a:solidFill>
+                  <a:srgbClr val="1E2A35"/>
+                </a:solidFill>
+                <a:latin typeface="Courier New" pitchFamily="34" charset="0"/>
+                <a:ea typeface="Courier New" pitchFamily="34" charset="-122"/>
+                <a:cs typeface="Courier New" pitchFamily="34" charset="-120"/>
+              </a:rPr>
+              <a:t>TotalValue</a:t>
+            </a:r>
+            <a:endParaRPr lang="en-US" sz="1100" dirty="0"/>
+          </a:p>
+          <a:p>
+            <a:pPr indent="0" marL="0">
+              <a:buNone/>
+            </a:pPr>
+            <a:r>
+              <a:rPr lang="en-US" sz="1100" dirty="0">
+                <a:solidFill>
+                  <a:srgbClr val="1E2A35"/>
+                </a:solidFill>
+                <a:latin typeface="Courier New" pitchFamily="34" charset="0"/>
+                <a:ea typeface="Courier New" pitchFamily="34" charset="-122"/>
+                <a:cs typeface="Courier New" pitchFamily="34" charset="-120"/>
+              </a:rPr>
+              <a:t>Price</a:t>
+            </a:r>
+            <a:endParaRPr lang="en-US" sz="1100" dirty="0"/>
+          </a:p>
+        </p:txBody>
+      </p:sp>
+      <p:sp>
+        <p:nvSpPr>
+          <p:cNvPr id="19" name="Shape 15"/>
+          <p:cNvSpPr/>
+          <p:nvPr/>
+        </p:nvSpPr>
+        <p:spPr>
+          <a:xfrm>
+            <a:off x="6126480" y="1371600"/>
+            <a:ext cx="2103120" cy="2468880"/>
+          </a:xfrm>
+          <a:prstGeom prst="roundRect">
+            <a:avLst>
+              <a:gd name="adj" fmla="val 4348"/>
+            </a:avLst>
+          </a:prstGeom>
+          <a:solidFill>
+            <a:srgbClr val="FFFFFF"/>
+          </a:solidFill>
+          <a:ln w="31750">
+            <a:solidFill>
+              <a:srgbClr val="E8832B"/>
+            </a:solidFill>
+            <a:prstDash val="solid"/>
+          </a:ln>
+        </p:spPr>
+      </p:sp>
+      <p:sp>
+        <p:nvSpPr>
+          <p:cNvPr id="20" name="Shape 16"/>
+          <p:cNvSpPr/>
+          <p:nvPr/>
+        </p:nvSpPr>
+        <p:spPr>
+          <a:xfrm>
+            <a:off x="6126480" y="1371600"/>
+            <a:ext cx="2103120" cy="502920"/>
+          </a:xfrm>
+          <a:prstGeom prst="rect">
+            <a:avLst/>
+          </a:prstGeom>
+          <a:solidFill>
+            <a:srgbClr val="E8832B"/>
+          </a:solidFill>
+          <a:ln w="12700">
+            <a:solidFill>
+              <a:srgbClr val="E8832B"/>
+            </a:solidFill>
+            <a:prstDash val="solid"/>
+          </a:ln>
+        </p:spPr>
+      </p:sp>
+      <p:sp>
+        <p:nvSpPr>
+          <p:cNvPr id="21" name="Text 17"/>
+          <p:cNvSpPr txBox="1"/>
+          <p:nvPr/>
+        </p:nvSpPr>
+        <p:spPr>
+          <a:xfrm>
+            <a:off x="6126480" y="1371600"/>
+            <a:ext cx="2103120" cy="502920"/>
+          </a:xfrm>
+          <a:prstGeom prst="rect">
+            <a:avLst/>
+          </a:prstGeom>
+          <a:noFill/>
+          <a:ln/>
+        </p:spPr>
+        <p:txBody>
+          <a:bodyPr wrap="square" lIns="0" tIns="0" rIns="0" bIns="0" rtlCol="0" anchor="ctr"/>
+          <a:lstStyle/>
+          <a:p>
+            <a:pPr algn="ctr" indent="0" marL="0">
+              <a:buNone/>
+            </a:pPr>
+            <a:r>
+              <a:rPr lang="en-US" sz="1500" b="1" dirty="0">
+                <a:solidFill>
+                  <a:srgbClr val="FFFFFF"/>
+                </a:solidFill>
+                <a:latin typeface="Cambria" pitchFamily="34" charset="0"/>
+                <a:ea typeface="Cambria" pitchFamily="34" charset="-122"/>
+                <a:cs typeface="Cambria" pitchFamily="34" charset="-120"/>
+              </a:rPr>
+              <a:t>Products</a:t>
+            </a:r>
+            <a:endParaRPr lang="en-US" sz="1500" dirty="0"/>
+          </a:p>
+        </p:txBody>
+      </p:sp>
+      <p:sp>
+        <p:nvSpPr>
+          <p:cNvPr id="22" name="Text 18"/>
+          <p:cNvSpPr txBox="1"/>
+          <p:nvPr/>
+        </p:nvSpPr>
+        <p:spPr>
+          <a:xfrm>
+            <a:off x="6263640" y="1965960"/>
+            <a:ext cx="1828800" cy="1783080"/>
+          </a:xfrm>
+          <a:prstGeom prst="rect">
+            <a:avLst/>
+          </a:prstGeom>
+          <a:noFill/>
+          <a:ln/>
+        </p:spPr>
+        <p:txBody>
+          <a:bodyPr wrap="square" lIns="0" tIns="0" rIns="0" bIns="0" rtlCol="0" anchor="t"/>
+          <a:lstStyle/>
+          <a:p>
+            <a:pPr indent="0" marL="0">
+              <a:buNone/>
+            </a:pPr>
+            <a:r>
+              <a:rPr lang="en-US" sz="1100" dirty="0">
+                <a:solidFill>
+                  <a:srgbClr val="1E2A35"/>
+                </a:solidFill>
+                <a:latin typeface="Courier New" pitchFamily="34" charset="0"/>
+                <a:ea typeface="Courier New" pitchFamily="34" charset="-122"/>
+                <a:cs typeface="Courier New" pitchFamily="34" charset="-120"/>
+              </a:rPr>
+              <a:t>ProductID (PK)</a:t>
+            </a:r>
+            <a:endParaRPr lang="en-US" sz="1100" dirty="0"/>
+          </a:p>
+          <a:p>
+            <a:pPr indent="0" marL="0">
+              <a:buNone/>
+            </a:pPr>
+            <a:r>
+              <a:rPr lang="en-US" sz="1100" dirty="0">
+                <a:solidFill>
+                  <a:srgbClr val="1E2A35"/>
+                </a:solidFill>
+                <a:latin typeface="Courier New" pitchFamily="34" charset="0"/>
+                <a:ea typeface="Courier New" pitchFamily="34" charset="-122"/>
+                <a:cs typeface="Courier New" pitchFamily="34" charset="-120"/>
+              </a:rPr>
+              <a:t>ProductName</a:t>
+            </a:r>
+            <a:endParaRPr lang="en-US" sz="1100" dirty="0"/>
+          </a:p>
+          <a:p>
+            <a:pPr indent="0" marL="0">
+              <a:buNone/>
+            </a:pPr>
+            <a:r>
+              <a:rPr lang="en-US" sz="1100" dirty="0">
+                <a:solidFill>
+                  <a:srgbClr val="1E2A35"/>
+                </a:solidFill>
+                <a:latin typeface="Courier New" pitchFamily="34" charset="0"/>
+                <a:ea typeface="Courier New" pitchFamily="34" charset="-122"/>
+                <a:cs typeface="Courier New" pitchFamily="34" charset="-120"/>
+              </a:rPr>
+              <a:t>Category</a:t>
+            </a:r>
+            <a:endParaRPr lang="en-US" sz="1100" dirty="0"/>
+          </a:p>
+          <a:p>
+            <a:pPr indent="0" marL="0">
+              <a:buNone/>
+            </a:pPr>
+            <a:r>
+              <a:rPr lang="en-US" sz="1100" dirty="0">
+                <a:solidFill>
+                  <a:srgbClr val="1E2A35"/>
+                </a:solidFill>
+                <a:latin typeface="Courier New" pitchFamily="34" charset="0"/>
+                <a:ea typeface="Courier New" pitchFamily="34" charset="-122"/>
+                <a:cs typeface="Courier New" pitchFamily="34" charset="-120"/>
+              </a:rPr>
+              <a:t>Price</a:t>
+            </a:r>
+            <a:endParaRPr lang="en-US" sz="1100" dirty="0"/>
+          </a:p>
+        </p:txBody>
+      </p:sp>
+      <p:sp>
+        <p:nvSpPr>
+          <p:cNvPr id="23" name="Shape 19"/>
+          <p:cNvSpPr/>
+          <p:nvPr/>
+        </p:nvSpPr>
+        <p:spPr>
+          <a:xfrm>
+            <a:off x="2651760" y="2651760"/>
+            <a:ext cx="594360" cy="0"/>
+          </a:xfrm>
+          <a:prstGeom prst="line">
+            <a:avLst/>
+          </a:prstGeom>
+          <a:noFill/>
+          <a:ln w="38100">
+            <a:solidFill>
+              <a:srgbClr val="5B6B79"/>
+            </a:solidFill>
+            <a:prstDash val="solid"/>
+          </a:ln>
+        </p:spPr>
+      </p:sp>
+      <p:sp>
+        <p:nvSpPr>
+          <p:cNvPr id="24" name="Shape 20"/>
+          <p:cNvSpPr/>
+          <p:nvPr/>
+        </p:nvSpPr>
+        <p:spPr>
+          <a:xfrm>
+            <a:off x="5532120" y="2651760"/>
+            <a:ext cx="594360" cy="0"/>
+          </a:xfrm>
+          <a:prstGeom prst="line">
+            <a:avLst/>
+          </a:prstGeom>
+          <a:noFill/>
+          <a:ln w="38100">
+            <a:solidFill>
+              <a:srgbClr val="5B6B79"/>
+            </a:solidFill>
+            <a:prstDash val="solid"/>
+          </a:ln>
+        </p:spPr>
+      </p:sp>
+      <p:sp>
+        <p:nvSpPr>
+          <p:cNvPr id="25" name="Text 21"/>
+          <p:cNvSpPr txBox="1"/>
+          <p:nvPr/>
+        </p:nvSpPr>
+        <p:spPr>
+          <a:xfrm>
+            <a:off x="2670048" y="2286000"/>
+            <a:ext cx="274320" cy="320040"/>
+          </a:xfrm>
+          <a:prstGeom prst="rect">
+            <a:avLst/>
+          </a:prstGeom>
+          <a:noFill/>
+          <a:ln/>
+        </p:spPr>
+        <p:txBody>
+          <a:bodyPr wrap="square" lIns="0" tIns="0" rIns="0" bIns="0" rtlCol="0" anchor="ctr"/>
+          <a:lstStyle/>
+          <a:p>
+            <a:pPr indent="0" marL="0">
+              <a:buNone/>
+            </a:pPr>
+            <a:r>
+              <a:rPr lang="en-US" sz="1600" b="1" dirty="0">
+                <a:solidFill>
+                  <a:srgbClr val="E02F8A"/>
                 </a:solidFill>
                 <a:latin typeface="Calibri" pitchFamily="34" charset="0"/>
                 <a:ea typeface="Calibri" pitchFamily="34" charset="-122"/>
                 <a:cs typeface="Calibri" pitchFamily="34" charset="-120"/>
               </a:rPr>
-              <a:t>TEMPEL SCREENSHOT</a:t>
-            </a:r>
-            <a:endParaRPr lang="en-US" sz="1200" dirty="0"/>
-          </a:p>
-          <a:p>
-            <a:pPr algn="ctr" indent="0" marL="0">
+              <a:t>1</a:t>
+            </a:r>
+            <a:endParaRPr lang="en-US" sz="1600" dirty="0"/>
+          </a:p>
+        </p:txBody>
+      </p:sp>
+      <p:sp>
+        <p:nvSpPr>
+          <p:cNvPr id="26" name="Text 22"/>
+          <p:cNvSpPr txBox="1"/>
+          <p:nvPr/>
+        </p:nvSpPr>
+        <p:spPr>
+          <a:xfrm>
+            <a:off x="2999232" y="2240280"/>
+            <a:ext cx="274320" cy="320040"/>
+          </a:xfrm>
+          <a:prstGeom prst="rect">
+            <a:avLst/>
+          </a:prstGeom>
+          <a:noFill/>
+          <a:ln/>
+        </p:spPr>
+        <p:txBody>
+          <a:bodyPr wrap="square" lIns="0" tIns="0" rIns="0" bIns="0" rtlCol="0" anchor="ctr"/>
+          <a:lstStyle/>
+          <a:p>
+            <a:pPr indent="0" marL="0">
               <a:buNone/>
             </a:pPr>
             <a:r>
               <a:rPr lang="en-US" sz="1600" b="1" dirty="0">
                 <a:solidFill>
-                  <a:srgbClr val="1A0683"/>
+                  <a:srgbClr val="E02F8A"/>
                 </a:solidFill>
                 <a:latin typeface="Calibri" pitchFamily="34" charset="0"/>
                 <a:ea typeface="Calibri" pitchFamily="34" charset="-122"/>
                 <a:cs typeface="Calibri" pitchFamily="34" charset="-120"/>
               </a:rPr>
-              <a:t>Model view</a:t>
-            </a:r>
-            <a:endParaRPr lang="en-US" sz="1200" dirty="0"/>
-          </a:p>
-          <a:p>
-            <a:pPr algn="ctr" indent="0" marL="0">
+              <a:t>*</a:t>
+            </a:r>
+            <a:endParaRPr lang="en-US" sz="1600" dirty="0"/>
+          </a:p>
+        </p:txBody>
+      </p:sp>
+      <p:sp>
+        <p:nvSpPr>
+          <p:cNvPr id="27" name="Text 23"/>
+          <p:cNvSpPr txBox="1"/>
+          <p:nvPr/>
+        </p:nvSpPr>
+        <p:spPr>
+          <a:xfrm>
+            <a:off x="5577840" y="2240280"/>
+            <a:ext cx="274320" cy="320040"/>
+          </a:xfrm>
+          <a:prstGeom prst="rect">
+            <a:avLst/>
+          </a:prstGeom>
+          <a:noFill/>
+          <a:ln/>
+        </p:spPr>
+        <p:txBody>
+          <a:bodyPr wrap="square" lIns="0" tIns="0" rIns="0" bIns="0" rtlCol="0" anchor="ctr"/>
+          <a:lstStyle/>
+          <a:p>
+            <a:pPr indent="0" marL="0">
               <a:buNone/>
             </a:pPr>
             <a:r>
-              <a:rPr lang="en-US" sz="1200" dirty="0">
-                <a:solidFill>
-                  <a:srgbClr val="5B6B79"/>
+              <a:rPr lang="en-US" sz="1600" b="1" dirty="0">
+                <a:solidFill>
+                  <a:srgbClr val="E02F8A"/>
                 </a:solidFill>
                 <a:latin typeface="Calibri" pitchFamily="34" charset="0"/>
                 <a:ea typeface="Calibri" pitchFamily="34" charset="-122"/>
                 <a:cs typeface="Calibri" pitchFamily="34" charset="-120"/>
               </a:rPr>
-              <a:t>Power BI: ikon ketiga di bilah kiri (Model view), pastikan tiga tabel dan garis relasi terlihat</a:t>
-            </a:r>
-            <a:endParaRPr lang="en-US" sz="1200" dirty="0"/>
-          </a:p>
-        </p:txBody>
-      </p:sp>
-      <p:sp>
-        <p:nvSpPr>
-          <p:cNvPr id="13" name="Text 9"/>
+              <a:t>*</a:t>
+            </a:r>
+            <a:endParaRPr lang="en-US" sz="1600" dirty="0"/>
+          </a:p>
+        </p:txBody>
+      </p:sp>
+      <p:sp>
+        <p:nvSpPr>
+          <p:cNvPr id="28" name="Text 24"/>
           <p:cNvSpPr txBox="1"/>
           <p:nvPr/>
         </p:nvSpPr>
         <p:spPr>
           <a:xfrm>
-            <a:off x="548640" y="5532120"/>
-            <a:ext cx="6949440" cy="731520"/>
+            <a:off x="5897880" y="2286000"/>
+            <a:ext cx="274320" cy="320040"/>
           </a:xfrm>
           <a:prstGeom prst="rect">
             <a:avLst/>
@@ -14263,22 +14922,61 @@
           <a:ln/>
         </p:spPr>
         <p:txBody>
-          <a:bodyPr wrap="square" lIns="0" tIns="0" rIns="0" bIns="0" rtlCol="0" anchor="t"/>
+          <a:bodyPr wrap="square" lIns="0" tIns="0" rIns="0" bIns="0" rtlCol="0" anchor="ctr"/>
           <a:lstStyle/>
           <a:p>
             <a:pPr indent="0" marL="0">
               <a:buNone/>
             </a:pPr>
             <a:r>
-              <a:rPr lang="en-US" sz="1200" dirty="0">
-                <a:solidFill>
-                  <a:srgbClr val="5B6B79"/>
+              <a:rPr lang="en-US" sz="1600" b="1" dirty="0">
+                <a:solidFill>
+                  <a:srgbClr val="E02F8A"/>
                 </a:solidFill>
                 <a:latin typeface="Calibri" pitchFamily="34" charset="0"/>
                 <a:ea typeface="Calibri" pitchFamily="34" charset="-122"/>
                 <a:cs typeface="Calibri" pitchFamily="34" charset="-120"/>
               </a:rPr>
-              <a:t>Cara mengambil: klik ikon Model view, atur letak tabel hingga ketiga garis relasi terlihat, lalu screenshot.</a:t>
+              <a:t>1</a:t>
+            </a:r>
+            <a:endParaRPr lang="en-US" sz="1600" dirty="0"/>
+          </a:p>
+        </p:txBody>
+      </p:sp>
+      <p:sp>
+        <p:nvSpPr>
+          <p:cNvPr id="29" name="Text 25"/>
+          <p:cNvSpPr txBox="1"/>
+          <p:nvPr/>
+        </p:nvSpPr>
+        <p:spPr>
+          <a:xfrm>
+            <a:off x="548640" y="4800600"/>
+            <a:ext cx="7680960" cy="320040"/>
+          </a:xfrm>
+          <a:prstGeom prst="rect">
+            <a:avLst/>
+          </a:prstGeom>
+          <a:noFill/>
+          <a:ln/>
+        </p:spPr>
+        <p:txBody>
+          <a:bodyPr wrap="square" lIns="0" tIns="0" rIns="0" bIns="0" rtlCol="0" anchor="ctr"/>
+          <a:lstStyle/>
+          <a:p>
+            <a:pPr indent="0" marL="0">
+              <a:buNone/>
+            </a:pPr>
+            <a:r>
+              <a:rPr lang="en-US" sz="1200" dirty="0">
+                <a:solidFill>
+                  <a:srgbClr val="1E2A35"/>
+                </a:solidFill>
+                <a:latin typeface="Courier New" pitchFamily="34" charset="0"/>
+                <a:ea typeface="Courier New" pitchFamily="34" charset="-122"/>
+                <a:cs typeface="Courier New" pitchFamily="34" charset="-120"/>
+              </a:rPr>
+              <a:t>Customers[CustomerID] 1 ---- * Transactions[CustomerID]</a:t>
             </a:r>
             <a:endParaRPr lang="en-US" sz="1200" dirty="0"/>
           </a:p>
@@ -14286,18 +14984,96 @@
       </p:sp>
       <p:sp>
         <p:nvSpPr>
-          <p:cNvPr id="14" name="Shape 10"/>
+          <p:cNvPr id="30" name="Text 26"/>
+          <p:cNvSpPr txBox="1"/>
+          <p:nvPr/>
+        </p:nvSpPr>
+        <p:spPr>
+          <a:xfrm>
+            <a:off x="548640" y="5166360"/>
+            <a:ext cx="7680960" cy="320040"/>
+          </a:xfrm>
+          <a:prstGeom prst="rect">
+            <a:avLst/>
+          </a:prstGeom>
+          <a:noFill/>
+          <a:ln/>
+        </p:spPr>
+        <p:txBody>
+          <a:bodyPr wrap="square" lIns="0" tIns="0" rIns="0" bIns="0" rtlCol="0" anchor="ctr"/>
+          <a:lstStyle/>
+          <a:p>
+            <a:pPr indent="0" marL="0">
+              <a:buNone/>
+            </a:pPr>
+            <a:r>
+              <a:rPr lang="en-US" sz="1200" dirty="0">
+                <a:solidFill>
+                  <a:srgbClr val="1E2A35"/>
+                </a:solidFill>
+                <a:latin typeface="Courier New" pitchFamily="34" charset="0"/>
+                <a:ea typeface="Courier New" pitchFamily="34" charset="-122"/>
+                <a:cs typeface="Courier New" pitchFamily="34" charset="-120"/>
+              </a:rPr>
+              <a:t>Products[ProductID] 1 ---- * Transactions[ProductID]</a:t>
+            </a:r>
+            <a:endParaRPr lang="en-US" sz="1200" dirty="0"/>
+          </a:p>
+        </p:txBody>
+      </p:sp>
+      <p:sp>
+        <p:nvSpPr>
+          <p:cNvPr id="31" name="Text 27"/>
+          <p:cNvSpPr txBox="1"/>
+          <p:nvPr/>
+        </p:nvSpPr>
+        <p:spPr>
+          <a:xfrm>
+            <a:off x="548640" y="5623560"/>
+            <a:ext cx="7680960" cy="548640"/>
+          </a:xfrm>
+          <a:prstGeom prst="rect">
+            <a:avLst/>
+          </a:prstGeom>
+          <a:noFill/>
+          <a:ln/>
+        </p:spPr>
+        <p:txBody>
+          <a:bodyPr wrap="square" lIns="0" tIns="0" rIns="0" bIns="0" rtlCol="0" anchor="t"/>
+          <a:lstStyle/>
+          <a:p>
+            <a:pPr indent="0" marL="0">
+              <a:buNone/>
+            </a:pPr>
+            <a:r>
+              <a:rPr lang="en-US" sz="1200" dirty="0">
+                <a:solidFill>
+                  <a:srgbClr val="5B6B79"/>
+                </a:solidFill>
+                <a:latin typeface="Calibri" pitchFamily="34" charset="0"/>
+                <a:ea typeface="Calibri" pitchFamily="34" charset="-122"/>
+                <a:cs typeface="Calibri" pitchFamily="34" charset="-120"/>
+              </a:rPr>
+              <a:t>Kedua relasi: aktif, banyak-ke-satu, arah filter tunggal (dari dimensi ke fakta). PK = kunci utama, FK = kunci tamu.</a:t>
+            </a:r>
+            <a:endParaRPr lang="en-US" sz="1200" dirty="0"/>
+          </a:p>
+        </p:txBody>
+      </p:sp>
+      <p:sp>
+        <p:nvSpPr>
+          <p:cNvPr id="32" name="Shape 28"/>
           <p:cNvSpPr/>
           <p:nvPr/>
         </p:nvSpPr>
         <p:spPr>
           <a:xfrm>
-            <a:off x="7680960" y="1280160"/>
-            <a:ext cx="3931920" cy="5029200"/>
+            <a:off x="8503920" y="1280160"/>
+            <a:ext cx="3108960" cy="5029200"/>
           </a:xfrm>
           <a:prstGeom prst="roundRect">
             <a:avLst>
-              <a:gd name="adj" fmla="val 2326"/>
+              <a:gd name="adj" fmla="val 2941"/>
             </a:avLst>
           </a:prstGeom>
           <a:solidFill>
@@ -14313,13 +15089,13 @@
       </p:sp>
       <p:sp>
         <p:nvSpPr>
-          <p:cNvPr id="15" name="Shape 11"/>
+          <p:cNvPr id="33" name="Shape 29"/>
           <p:cNvSpPr/>
           <p:nvPr/>
         </p:nvSpPr>
         <p:spPr>
           <a:xfrm>
-            <a:off x="7680960" y="1371600"/>
+            <a:off x="8503920" y="1371600"/>
             <a:ext cx="82296" cy="4846320"/>
           </a:xfrm>
           <a:prstGeom prst="rect">
@@ -14338,14 +15114,14 @@
       </p:sp>
       <p:sp>
         <p:nvSpPr>
-          <p:cNvPr id="16" name="Text 12"/>
+          <p:cNvPr id="34" name="Text 30"/>
           <p:cNvSpPr txBox="1"/>
           <p:nvPr/>
         </p:nvSpPr>
         <p:spPr>
           <a:xfrm>
-            <a:off x="7909560" y="1417320"/>
-            <a:ext cx="3520440" cy="411480"/>
+            <a:off x="8732520" y="1417320"/>
+            <a:ext cx="2697480" cy="411480"/>
           </a:xfrm>
           <a:prstGeom prst="rect">
             <a:avLst/>
@@ -14377,14 +15153,14 @@
       </p:sp>
       <p:sp>
         <p:nvSpPr>
-          <p:cNvPr id="17" name="Text 13"/>
+          <p:cNvPr id="35" name="Text 31"/>
           <p:cNvSpPr txBox="1"/>
           <p:nvPr/>
         </p:nvSpPr>
         <p:spPr>
           <a:xfrm>
-            <a:off x="7909560" y="1920240"/>
-            <a:ext cx="3520440" cy="4251960"/>
+            <a:off x="8732520" y="1920240"/>
+            <a:ext cx="2697480" cy="4251960"/>
           </a:xfrm>
           <a:prstGeom prst="rect">
             <a:avLst/>
